--- a/examples/ppt/pictures/pictures-basic.pptx
+++ b/examples/ppt/pictures/pictures-basic.pptx
@@ -5,11 +5,11 @@
     <p:sldMasterId xmlns:r="http://schemas.openxmlformats.org/officeDocument/2006/relationships" id="2147483648" r:id="rId1"/>
   </p:sldMasterIdLst>
   <p:sldIdLst>
-    <p:sldId id="256" r:id="R3dcceff061c540e1"/>
-    <p:sldId id="257" r:id="R27308a6bede34fcb"/>
-    <p:sldId id="258" r:id="R8e9281b5259948b7"/>
-    <p:sldId id="259" r:id="R7b17fb17a8214b09"/>
-    <p:sldId id="260" r:id="R0c49aeb2b2314d11"/>
+    <p:sldId id="256" r:id="Red16db99dd714ee3"/>
+    <p:sldId id="257" r:id="R5e385fcf774f4f18"/>
+    <p:sldId id="258" r:id="R1c59c99c730c46b8"/>
+    <p:sldId id="259" r:id="Rcb53246a0a5c496c"/>
+    <p:sldId id="260" r:id="Rf3d87a5d776f4178"/>
   </p:sldIdLst>
   <p:sldSz cx="12192000" cy="6858000"/>
   <p:notesSz cx="6858000" cy="9144000"/>
@@ -318,7 +318,7 @@
       <p:grpSpPr/>
       <p:sp>
         <p:nvSpPr>
-          <p:cNvPr id="10000" name="TextBox 1"/>
+          <p:cNvPr id="100000" name="TextBox 1"/>
           <p:cNvSpPr txBox="1"/>
           <p:nvPr/>
         </p:nvSpPr>
@@ -344,14 +344,14 @@
       </p:sp>
       <p:pic>
         <p:nvPicPr>
-          <p:cNvPr id="10001" name="Picture 1" descr="gradient image from disk"/>
-          <p:cNvPicPr>
-            <a:picLocks xmlns:a="http://schemas.openxmlformats.org/drawingml/2006/main" noChangeAspect="1"/>
-          </p:cNvPicPr>
-          <p:nvPr/>
-        </p:nvPicPr>
-        <p:blipFill>
-          <a:blip xmlns:r="http://schemas.openxmlformats.org/officeDocument/2006/relationships" xmlns:a="http://schemas.openxmlformats.org/drawingml/2006/main" r:embed="R4b703a06bad84181"/>
+          <p:cNvPr id="100001" name="Picture 1" descr="gradient image from disk"/>
+          <p:cNvPicPr>
+            <a:picLocks xmlns:a="http://schemas.openxmlformats.org/drawingml/2006/main" noChangeAspect="1"/>
+          </p:cNvPicPr>
+          <p:nvPr/>
+        </p:nvPicPr>
+        <p:blipFill>
+          <a:blip xmlns:r="http://schemas.openxmlformats.org/officeDocument/2006/relationships" xmlns:a="http://schemas.openxmlformats.org/drawingml/2006/main" r:embed="R37b9258640074a38"/>
           <a:stretch xmlns:a="http://schemas.openxmlformats.org/drawingml/2006/main">
             <a:fillRect/>
           </a:stretch>
@@ -368,7 +368,7 @@
       </p:pic>
       <p:sp>
         <p:nvSpPr>
-          <p:cNvPr id="10002" name="TextBox 2"/>
+          <p:cNvPr id="100002" name="TextBox 2"/>
           <p:cNvSpPr txBox="1"/>
           <p:nvPr/>
         </p:nvSpPr>
@@ -394,14 +394,14 @@
       </p:sp>
       <p:pic>
         <p:nvPicPr>
-          <p:cNvPr id="10003" name="Picture 2" descr="geometric shapes embedded as data-URI"/>
-          <p:cNvPicPr>
-            <a:picLocks xmlns:a="http://schemas.openxmlformats.org/drawingml/2006/main" noChangeAspect="1"/>
-          </p:cNvPicPr>
-          <p:nvPr/>
-        </p:nvPicPr>
-        <p:blipFill>
-          <a:blip xmlns:r="http://schemas.openxmlformats.org/officeDocument/2006/relationships" xmlns:a="http://schemas.openxmlformats.org/drawingml/2006/main" r:embed="Rfbac2fedadf14d12"/>
+          <p:cNvPr id="100003" name="Picture 2" descr="geometric shapes embedded as data-URI"/>
+          <p:cNvPicPr>
+            <a:picLocks xmlns:a="http://schemas.openxmlformats.org/drawingml/2006/main" noChangeAspect="1"/>
+          </p:cNvPicPr>
+          <p:nvPr/>
+        </p:nvPicPr>
+        <p:blipFill>
+          <a:blip xmlns:r="http://schemas.openxmlformats.org/officeDocument/2006/relationships" xmlns:a="http://schemas.openxmlformats.org/drawingml/2006/main" r:embed="Rd2ef798d189540d5"/>
           <a:stretch xmlns:a="http://schemas.openxmlformats.org/drawingml/2006/main">
             <a:fillRect/>
           </a:stretch>
@@ -418,7 +418,7 @@
       </p:pic>
       <p:sp>
         <p:nvSpPr>
-          <p:cNvPr id="10004" name="TextBox 3"/>
+          <p:cNvPr id="100004" name="TextBox 3"/>
           <p:cNvSpPr txBox="1"/>
           <p:nvPr/>
         </p:nvSpPr>
@@ -444,14 +444,14 @@
       </p:sp>
       <p:pic>
         <p:nvPicPr>
-          <p:cNvPr id="10005" name="hero-photo" descr="pseudo-photo gradient"/>
-          <p:cNvPicPr>
-            <a:picLocks xmlns:a="http://schemas.openxmlformats.org/drawingml/2006/main" noChangeAspect="1"/>
-          </p:cNvPicPr>
-          <p:nvPr/>
-        </p:nvPicPr>
-        <p:blipFill>
-          <a:blip xmlns:r="http://schemas.openxmlformats.org/officeDocument/2006/relationships" xmlns:a="http://schemas.openxmlformats.org/drawingml/2006/main" r:embed="R0ef2632e391142f0"/>
+          <p:cNvPr id="100005" name="hero-photo" descr="pseudo-photo gradient"/>
+          <p:cNvPicPr>
+            <a:picLocks xmlns:a="http://schemas.openxmlformats.org/drawingml/2006/main" noChangeAspect="1"/>
+          </p:cNvPicPr>
+          <p:nvPr/>
+        </p:nvPicPr>
+        <p:blipFill>
+          <a:blip xmlns:r="http://schemas.openxmlformats.org/officeDocument/2006/relationships" xmlns:a="http://schemas.openxmlformats.org/drawingml/2006/main" r:embed="R5ab13fa2e97a4b95" cstate="print"/>
           <a:stretch xmlns:a="http://schemas.openxmlformats.org/drawingml/2006/main">
             <a:fillRect/>
           </a:stretch>
@@ -468,7 +468,7 @@
       </p:pic>
       <p:sp>
         <p:nvSpPr>
-          <p:cNvPr id="10006" name="TextBox 4"/>
+          <p:cNvPr id="100006" name="TextBox 4"/>
           <p:cNvSpPr txBox="1"/>
           <p:nvPr/>
         </p:nvSpPr>
@@ -487,7 +487,7 @@
           <a:p xmlns:a="http://schemas.openxmlformats.org/drawingml/2006/main">
             <a:r>
               <a:rPr lang="en-US" sz="1200" i="1"/>
-              <a:t>src=&lt;file path&gt; + name="hero-photo"</a:t>
+              <a:t>src=&lt;file&gt; + name="hero-photo" + compressionState=print</a:t>
             </a:r>
           </a:p>
         </p:txBody>
@@ -509,7 +509,7 @@
       <p:grpSpPr/>
       <p:sp>
         <p:nvSpPr>
-          <p:cNvPr id="10007" name="TextBox 1"/>
+          <p:cNvPr id="100007" name="TextBox 1"/>
           <p:cNvSpPr txBox="1"/>
           <p:nvPr/>
         </p:nvSpPr>
@@ -535,14 +535,14 @@
       </p:sp>
       <p:pic>
         <p:nvPicPr>
-          <p:cNvPr id="10008" name="Picture 1" descr="geometric.png"/>
-          <p:cNvPicPr>
-            <a:picLocks xmlns:a="http://schemas.openxmlformats.org/drawingml/2006/main" noChangeAspect="1"/>
-          </p:cNvPicPr>
-          <p:nvPr/>
-        </p:nvPicPr>
-        <p:blipFill>
-          <a:blip xmlns:r="http://schemas.openxmlformats.org/officeDocument/2006/relationships" xmlns:a="http://schemas.openxmlformats.org/drawingml/2006/main" r:embed="Rfcd0715b42774585"/>
+          <p:cNvPr id="100008" name="Picture 1"/>
+          <p:cNvPicPr>
+            <a:picLocks xmlns:a="http://schemas.openxmlformats.org/drawingml/2006/main" noChangeAspect="1"/>
+          </p:cNvPicPr>
+          <p:nvPr/>
+        </p:nvPicPr>
+        <p:blipFill>
+          <a:blip xmlns:r="http://schemas.openxmlformats.org/officeDocument/2006/relationships" xmlns:a="http://schemas.openxmlformats.org/drawingml/2006/main" r:embed="Rf189b9a87eff48d0"/>
           <a:stretch xmlns:a="http://schemas.openxmlformats.org/drawingml/2006/main">
             <a:fillRect/>
           </a:stretch>
@@ -559,7 +559,7 @@
       </p:pic>
       <p:sp>
         <p:nvSpPr>
-          <p:cNvPr id="10009" name="TextBox 2"/>
+          <p:cNvPr id="100009" name="TextBox 2"/>
           <p:cNvSpPr txBox="1"/>
           <p:nvPr/>
         </p:nvSpPr>
@@ -585,14 +585,14 @@
       </p:sp>
       <p:pic>
         <p:nvPicPr>
-          <p:cNvPr id="10010" name="Picture 2" descr="geometric.png"/>
-          <p:cNvPicPr>
-            <a:picLocks xmlns:a="http://schemas.openxmlformats.org/drawingml/2006/main" noChangeAspect="1"/>
-          </p:cNvPicPr>
-          <p:nvPr/>
-        </p:nvPicPr>
-        <p:blipFill>
-          <a:blip xmlns:r="http://schemas.openxmlformats.org/officeDocument/2006/relationships" xmlns:a="http://schemas.openxmlformats.org/drawingml/2006/main" r:embed="R4d67b9a52c324348"/>
+          <p:cNvPr id="100010" name="Picture 2"/>
+          <p:cNvPicPr>
+            <a:picLocks xmlns:a="http://schemas.openxmlformats.org/drawingml/2006/main" noChangeAspect="1"/>
+          </p:cNvPicPr>
+          <p:nvPr/>
+        </p:nvPicPr>
+        <p:blipFill>
+          <a:blip xmlns:r="http://schemas.openxmlformats.org/officeDocument/2006/relationships" xmlns:a="http://schemas.openxmlformats.org/drawingml/2006/main" r:embed="Rdf1f50511d5a4cd8"/>
           <a:srcRect xmlns:a="http://schemas.openxmlformats.org/drawingml/2006/main" l="20000" t="20000" r="20000" b="20000"/>
           <a:stretch xmlns:a="http://schemas.openxmlformats.org/drawingml/2006/main">
             <a:fillRect/>
@@ -610,7 +610,7 @@
       </p:pic>
       <p:sp>
         <p:nvSpPr>
-          <p:cNvPr id="10011" name="TextBox 3"/>
+          <p:cNvPr id="100011" name="TextBox 3"/>
           <p:cNvSpPr txBox="1"/>
           <p:nvPr/>
         </p:nvSpPr>
@@ -636,14 +636,14 @@
       </p:sp>
       <p:pic>
         <p:nvPicPr>
-          <p:cNvPr id="10012" name="Picture 3" descr="geometric.png"/>
-          <p:cNvPicPr>
-            <a:picLocks xmlns:a="http://schemas.openxmlformats.org/drawingml/2006/main" noChangeAspect="1"/>
-          </p:cNvPicPr>
-          <p:nvPr/>
-        </p:nvPicPr>
-        <p:blipFill>
-          <a:blip xmlns:r="http://schemas.openxmlformats.org/officeDocument/2006/relationships" xmlns:a="http://schemas.openxmlformats.org/drawingml/2006/main" r:embed="Rc333d3005c85428e"/>
+          <p:cNvPr id="100012" name="Picture 3"/>
+          <p:cNvPicPr>
+            <a:picLocks xmlns:a="http://schemas.openxmlformats.org/drawingml/2006/main" noChangeAspect="1"/>
+          </p:cNvPicPr>
+          <p:nvPr/>
+        </p:nvPicPr>
+        <p:blipFill>
+          <a:blip xmlns:r="http://schemas.openxmlformats.org/officeDocument/2006/relationships" xmlns:a="http://schemas.openxmlformats.org/drawingml/2006/main" r:embed="Ref52cffddf65483b"/>
           <a:srcRect xmlns:a="http://schemas.openxmlformats.org/drawingml/2006/main" l="30000" t="10000" r="30000" b="10000"/>
           <a:stretch xmlns:a="http://schemas.openxmlformats.org/drawingml/2006/main">
             <a:fillRect/>
@@ -661,7 +661,7 @@
       </p:pic>
       <p:sp>
         <p:nvSpPr>
-          <p:cNvPr id="10013" name="TextBox 4"/>
+          <p:cNvPr id="100013" name="TextBox 4"/>
           <p:cNvSpPr txBox="1"/>
           <p:nvPr/>
         </p:nvSpPr>
@@ -687,14 +687,14 @@
       </p:sp>
       <p:pic>
         <p:nvPicPr>
-          <p:cNvPr id="10014" name="Picture 4" descr="geometric.png"/>
-          <p:cNvPicPr>
-            <a:picLocks xmlns:a="http://schemas.openxmlformats.org/drawingml/2006/main" noChangeAspect="1"/>
-          </p:cNvPicPr>
-          <p:nvPr/>
-        </p:nvPicPr>
-        <p:blipFill>
-          <a:blip xmlns:r="http://schemas.openxmlformats.org/officeDocument/2006/relationships" xmlns:a="http://schemas.openxmlformats.org/drawingml/2006/main" r:embed="R0f6fa72119744251"/>
+          <p:cNvPr id="100014" name="Picture 4"/>
+          <p:cNvPicPr>
+            <a:picLocks xmlns:a="http://schemas.openxmlformats.org/drawingml/2006/main" noChangeAspect="1"/>
+          </p:cNvPicPr>
+          <p:nvPr/>
+        </p:nvPicPr>
+        <p:blipFill>
+          <a:blip xmlns:r="http://schemas.openxmlformats.org/officeDocument/2006/relationships" xmlns:a="http://schemas.openxmlformats.org/drawingml/2006/main" r:embed="R9bfda40776114cbf"/>
           <a:srcRect xmlns:a="http://schemas.openxmlformats.org/drawingml/2006/main" l="25000" t="25000"/>
           <a:stretch xmlns:a="http://schemas.openxmlformats.org/drawingml/2006/main">
             <a:fillRect/>
@@ -712,7 +712,7 @@
       </p:pic>
       <p:sp>
         <p:nvSpPr>
-          <p:cNvPr id="10015" name="TextBox 5"/>
+          <p:cNvPr id="100015" name="TextBox 5"/>
           <p:cNvSpPr txBox="1"/>
           <p:nvPr/>
         </p:nvSpPr>
@@ -738,14 +738,14 @@
       </p:sp>
       <p:pic>
         <p:nvPicPr>
-          <p:cNvPr id="10016" name="Picture 5" descr="geometric.png"/>
-          <p:cNvPicPr>
-            <a:picLocks xmlns:a="http://schemas.openxmlformats.org/drawingml/2006/main" noChangeAspect="1"/>
-          </p:cNvPicPr>
-          <p:nvPr/>
-        </p:nvPicPr>
-        <p:blipFill>
-          <a:blip xmlns:r="http://schemas.openxmlformats.org/officeDocument/2006/relationships" xmlns:a="http://schemas.openxmlformats.org/drawingml/2006/main" r:embed="Rd739b66b550441e4"/>
+          <p:cNvPr id="100016" name="Picture 5"/>
+          <p:cNvPicPr>
+            <a:picLocks xmlns:a="http://schemas.openxmlformats.org/drawingml/2006/main" noChangeAspect="1"/>
+          </p:cNvPicPr>
+          <p:nvPr/>
+        </p:nvPicPr>
+        <p:blipFill>
+          <a:blip xmlns:r="http://schemas.openxmlformats.org/officeDocument/2006/relationships" xmlns:a="http://schemas.openxmlformats.org/drawingml/2006/main" r:embed="R05f483b0ca114373"/>
           <a:srcRect xmlns:a="http://schemas.openxmlformats.org/drawingml/2006/main" l="5000" t="10000" r="40000" b="20000"/>
           <a:stretch xmlns:a="http://schemas.openxmlformats.org/drawingml/2006/main">
             <a:fillRect/>
@@ -763,7 +763,7 @@
       </p:pic>
       <p:sp>
         <p:nvSpPr>
-          <p:cNvPr id="10017" name="TextBox 6"/>
+          <p:cNvPr id="100017" name="TextBox 6"/>
           <p:cNvSpPr txBox="1"/>
           <p:nvPr/>
         </p:nvSpPr>
@@ -804,7 +804,7 @@
       <p:grpSpPr/>
       <p:sp>
         <p:nvSpPr>
-          <p:cNvPr id="10018" name="TextBox 1"/>
+          <p:cNvPr id="100018" name="TextBox 1"/>
           <p:cNvSpPr txBox="1"/>
           <p:nvPr/>
         </p:nvSpPr>
@@ -830,14 +830,14 @@
       </p:sp>
       <p:pic>
         <p:nvPicPr>
-          <p:cNvPr id="10019" name="Picture 1" descr="geometric.png"/>
-          <p:cNvPicPr>
-            <a:picLocks xmlns:a="http://schemas.openxmlformats.org/drawingml/2006/main" noChangeAspect="1"/>
-          </p:cNvPicPr>
-          <p:nvPr/>
-        </p:nvPicPr>
-        <p:blipFill>
-          <a:blip xmlns:r="http://schemas.openxmlformats.org/officeDocument/2006/relationships" xmlns:a="http://schemas.openxmlformats.org/drawingml/2006/main" r:embed="R3b7f04c345dd4b24"/>
+          <p:cNvPr id="100019" name="Picture 1"/>
+          <p:cNvPicPr>
+            <a:picLocks xmlns:a="http://schemas.openxmlformats.org/drawingml/2006/main" noChangeAspect="1"/>
+          </p:cNvPicPr>
+          <p:nvPr/>
+        </p:nvPicPr>
+        <p:blipFill>
+          <a:blip xmlns:r="http://schemas.openxmlformats.org/officeDocument/2006/relationships" xmlns:a="http://schemas.openxmlformats.org/drawingml/2006/main" r:embed="R01e9421dd60946cd"/>
           <a:stretch xmlns:a="http://schemas.openxmlformats.org/drawingml/2006/main">
             <a:fillRect/>
           </a:stretch>
@@ -854,7 +854,7 @@
       </p:pic>
       <p:sp>
         <p:nvSpPr>
-          <p:cNvPr id="10020" name="TextBox 2"/>
+          <p:cNvPr id="100020" name="TextBox 2"/>
           <p:cNvSpPr txBox="1"/>
           <p:nvPr/>
         </p:nvSpPr>
@@ -880,14 +880,14 @@
       </p:sp>
       <p:pic>
         <p:nvPicPr>
-          <p:cNvPr id="10021" name="Picture 2" descr="geometric.png"/>
-          <p:cNvPicPr>
-            <a:picLocks xmlns:a="http://schemas.openxmlformats.org/drawingml/2006/main" noChangeAspect="1"/>
-          </p:cNvPicPr>
-          <p:nvPr/>
-        </p:nvPicPr>
-        <p:blipFill>
-          <a:blip xmlns:r="http://schemas.openxmlformats.org/officeDocument/2006/relationships" xmlns:a="http://schemas.openxmlformats.org/drawingml/2006/main" r:embed="Recaabe50c9d7418e"/>
+          <p:cNvPr id="100021" name="Picture 2"/>
+          <p:cNvPicPr>
+            <a:picLocks xmlns:a="http://schemas.openxmlformats.org/drawingml/2006/main" noChangeAspect="1"/>
+          </p:cNvPicPr>
+          <p:nvPr/>
+        </p:nvPicPr>
+        <p:blipFill>
+          <a:blip xmlns:r="http://schemas.openxmlformats.org/officeDocument/2006/relationships" xmlns:a="http://schemas.openxmlformats.org/drawingml/2006/main" r:embed="R183fcebd88a74873"/>
           <a:stretch xmlns:a="http://schemas.openxmlformats.org/drawingml/2006/main">
             <a:fillRect/>
           </a:stretch>
@@ -904,7 +904,7 @@
       </p:pic>
       <p:sp>
         <p:nvSpPr>
-          <p:cNvPr id="10022" name="TextBox 3"/>
+          <p:cNvPr id="100022" name="TextBox 3"/>
           <p:cNvSpPr txBox="1"/>
           <p:nvPr/>
         </p:nvSpPr>
@@ -930,14 +930,14 @@
       </p:sp>
       <p:pic>
         <p:nvPicPr>
-          <p:cNvPr id="10023" name="Picture 3" descr="geometric.png"/>
-          <p:cNvPicPr>
-            <a:picLocks xmlns:a="http://schemas.openxmlformats.org/drawingml/2006/main" noChangeAspect="1"/>
-          </p:cNvPicPr>
-          <p:nvPr/>
-        </p:nvPicPr>
-        <p:blipFill>
-          <a:blip xmlns:r="http://schemas.openxmlformats.org/officeDocument/2006/relationships" xmlns:a="http://schemas.openxmlformats.org/drawingml/2006/main" r:embed="Rad90c4ea703d4cf5"/>
+          <p:cNvPr id="100023" name="Picture 3"/>
+          <p:cNvPicPr>
+            <a:picLocks xmlns:a="http://schemas.openxmlformats.org/drawingml/2006/main" noChangeAspect="1"/>
+          </p:cNvPicPr>
+          <p:nvPr/>
+        </p:nvPicPr>
+        <p:blipFill>
+          <a:blip xmlns:r="http://schemas.openxmlformats.org/officeDocument/2006/relationships" xmlns:a="http://schemas.openxmlformats.org/drawingml/2006/main" r:embed="R58101af510754738"/>
           <a:stretch xmlns:a="http://schemas.openxmlformats.org/drawingml/2006/main">
             <a:fillRect/>
           </a:stretch>
@@ -954,7 +954,7 @@
       </p:pic>
       <p:sp>
         <p:nvSpPr>
-          <p:cNvPr id="10024" name="TextBox 4"/>
+          <p:cNvPr id="100024" name="TextBox 4"/>
           <p:cNvSpPr txBox="1"/>
           <p:nvPr/>
         </p:nvSpPr>
@@ -980,14 +980,14 @@
       </p:sp>
       <p:pic>
         <p:nvPicPr>
-          <p:cNvPr id="10025" name="Picture 4" descr="geometric.png"/>
-          <p:cNvPicPr>
-            <a:picLocks xmlns:a="http://schemas.openxmlformats.org/drawingml/2006/main" noChangeAspect="1"/>
-          </p:cNvPicPr>
-          <p:nvPr/>
-        </p:nvPicPr>
-        <p:blipFill>
-          <a:blip xmlns:r="http://schemas.openxmlformats.org/officeDocument/2006/relationships" xmlns:a="http://schemas.openxmlformats.org/drawingml/2006/main" r:embed="Re2ecbbc538224284"/>
+          <p:cNvPr id="100025" name="Picture 4"/>
+          <p:cNvPicPr>
+            <a:picLocks xmlns:a="http://schemas.openxmlformats.org/drawingml/2006/main" noChangeAspect="1"/>
+          </p:cNvPicPr>
+          <p:nvPr/>
+        </p:nvPicPr>
+        <p:blipFill>
+          <a:blip xmlns:r="http://schemas.openxmlformats.org/officeDocument/2006/relationships" xmlns:a="http://schemas.openxmlformats.org/drawingml/2006/main" r:embed="R610873d96f9842bb"/>
           <a:stretch xmlns:a="http://schemas.openxmlformats.org/drawingml/2006/main">
             <a:fillRect/>
           </a:stretch>
@@ -1004,7 +1004,7 @@
       </p:pic>
       <p:sp>
         <p:nvSpPr>
-          <p:cNvPr id="10026" name="TextBox 5"/>
+          <p:cNvPr id="100026" name="TextBox 5"/>
           <p:cNvSpPr txBox="1"/>
           <p:nvPr/>
         </p:nvSpPr>
@@ -1030,14 +1030,14 @@
       </p:sp>
       <p:pic>
         <p:nvPicPr>
-          <p:cNvPr id="10027" name="Picture 5" descr="geometric.png"/>
-          <p:cNvPicPr>
-            <a:picLocks xmlns:a="http://schemas.openxmlformats.org/drawingml/2006/main" noChangeAspect="1"/>
-          </p:cNvPicPr>
-          <p:nvPr/>
-        </p:nvPicPr>
-        <p:blipFill>
-          <a:blip xmlns:r="http://schemas.openxmlformats.org/officeDocument/2006/relationships" xmlns:a="http://schemas.openxmlformats.org/drawingml/2006/main" r:embed="Rc1149732562f4854"/>
+          <p:cNvPr id="100027" name="Picture 5"/>
+          <p:cNvPicPr>
+            <a:picLocks xmlns:a="http://schemas.openxmlformats.org/drawingml/2006/main" noChangeAspect="1"/>
+          </p:cNvPicPr>
+          <p:nvPr/>
+        </p:nvPicPr>
+        <p:blipFill>
+          <a:blip xmlns:r="http://schemas.openxmlformats.org/officeDocument/2006/relationships" xmlns:a="http://schemas.openxmlformats.org/drawingml/2006/main" r:embed="R9229685053b44d26"/>
           <a:stretch xmlns:a="http://schemas.openxmlformats.org/drawingml/2006/main">
             <a:fillRect/>
           </a:stretch>
@@ -1054,7 +1054,7 @@
       </p:pic>
       <p:sp>
         <p:nvSpPr>
-          <p:cNvPr id="10028" name="TextBox 6"/>
+          <p:cNvPr id="100028" name="TextBox 6"/>
           <p:cNvSpPr txBox="1"/>
           <p:nvPr/>
         </p:nvSpPr>
@@ -1080,14 +1080,14 @@
       </p:sp>
       <p:pic>
         <p:nvPicPr>
-          <p:cNvPr id="10029" name="Picture 6" descr="geometric.png"/>
-          <p:cNvPicPr>
-            <a:picLocks xmlns:a="http://schemas.openxmlformats.org/drawingml/2006/main" noChangeAspect="1"/>
-          </p:cNvPicPr>
-          <p:nvPr/>
-        </p:nvPicPr>
-        <p:blipFill>
-          <a:blip xmlns:r="http://schemas.openxmlformats.org/officeDocument/2006/relationships" xmlns:a="http://schemas.openxmlformats.org/drawingml/2006/main" r:embed="R8816d76448234fab"/>
+          <p:cNvPr id="100029" name="Picture 6"/>
+          <p:cNvPicPr>
+            <a:picLocks xmlns:a="http://schemas.openxmlformats.org/drawingml/2006/main" noChangeAspect="1"/>
+          </p:cNvPicPr>
+          <p:nvPr/>
+        </p:nvPicPr>
+        <p:blipFill>
+          <a:blip xmlns:r="http://schemas.openxmlformats.org/officeDocument/2006/relationships" xmlns:a="http://schemas.openxmlformats.org/drawingml/2006/main" r:embed="Rb340eaaf410c4405"/>
           <a:stretch xmlns:a="http://schemas.openxmlformats.org/drawingml/2006/main">
             <a:fillRect/>
           </a:stretch>
@@ -1104,7 +1104,7 @@
       </p:pic>
       <p:sp>
         <p:nvSpPr>
-          <p:cNvPr id="10030" name="TextBox 7"/>
+          <p:cNvPr id="100030" name="TextBox 7"/>
           <p:cNvSpPr txBox="1"/>
           <p:nvPr/>
         </p:nvSpPr>
@@ -1145,7 +1145,7 @@
       <p:grpSpPr/>
       <p:sp>
         <p:nvSpPr>
-          <p:cNvPr id="10031" name="TextBox 1"/>
+          <p:cNvPr id="100031" name="TextBox 1"/>
           <p:cNvSpPr txBox="1"/>
           <p:nvPr/>
         </p:nvSpPr>
@@ -1171,8 +1171,8 @@
       </p:sp>
       <p:pic>
         <p:nvPicPr>
-          <p:cNvPr id="10032" name="Picture 1" descr="gradient.png">
-            <a:hlinkClick xmlns:r="http://schemas.openxmlformats.org/officeDocument/2006/relationships" xmlns:a="http://schemas.openxmlformats.org/drawingml/2006/main" r:id="R9820fdc3a92f43a2" tooltip="Open example.com"/>
+          <p:cNvPr id="100032" name="Picture 1">
+            <a:hlinkClick xmlns:r="http://schemas.openxmlformats.org/officeDocument/2006/relationships" xmlns:a="http://schemas.openxmlformats.org/drawingml/2006/main" r:id="Rc18b1a62bf1a49d9" tooltip="Open example.com"/>
           </p:cNvPr>
           <p:cNvPicPr>
             <a:picLocks xmlns:a="http://schemas.openxmlformats.org/drawingml/2006/main" noChangeAspect="1"/>
@@ -1180,7 +1180,7 @@
           <p:nvPr/>
         </p:nvPicPr>
         <p:blipFill>
-          <a:blip xmlns:r="http://schemas.openxmlformats.org/officeDocument/2006/relationships" xmlns:a="http://schemas.openxmlformats.org/drawingml/2006/main" r:embed="Re39a17ab07124657"/>
+          <a:blip xmlns:r="http://schemas.openxmlformats.org/officeDocument/2006/relationships" xmlns:a="http://schemas.openxmlformats.org/drawingml/2006/main" r:embed="Rae0a5663796e4c15"/>
           <a:stretch xmlns:a="http://schemas.openxmlformats.org/drawingml/2006/main">
             <a:fillRect/>
           </a:stretch>
@@ -1197,7 +1197,7 @@
       </p:pic>
       <p:sp>
         <p:nvSpPr>
-          <p:cNvPr id="10033" name="TextBox 2"/>
+          <p:cNvPr id="100033" name="TextBox 2"/>
           <p:cNvSpPr txBox="1"/>
           <p:nvPr/>
         </p:nvSpPr>
@@ -1223,8 +1223,8 @@
       </p:sp>
       <p:pic>
         <p:nvPicPr>
-          <p:cNvPr id="10034" name="Picture 2" descr="geometric.png">
-            <a:hlinkClick xmlns:r="http://schemas.openxmlformats.org/officeDocument/2006/relationships" xmlns:a="http://schemas.openxmlformats.org/drawingml/2006/main" r:id="R66fb232db0454b92" action="ppaction://hlinksldjump" tooltip="Back to slide 1"/>
+          <p:cNvPr id="100034" name="Picture 2">
+            <a:hlinkClick xmlns:r="http://schemas.openxmlformats.org/officeDocument/2006/relationships" xmlns:a="http://schemas.openxmlformats.org/drawingml/2006/main" r:id="R86df93221ee84280" action="ppaction://hlinksldjump" tooltip="Back to slide 1"/>
           </p:cNvPr>
           <p:cNvPicPr>
             <a:picLocks xmlns:a="http://schemas.openxmlformats.org/drawingml/2006/main" noChangeAspect="1"/>
@@ -1232,7 +1232,7 @@
           <p:nvPr/>
         </p:nvPicPr>
         <p:blipFill>
-          <a:blip xmlns:r="http://schemas.openxmlformats.org/officeDocument/2006/relationships" xmlns:a="http://schemas.openxmlformats.org/drawingml/2006/main" r:embed="R24a1ae0c5ce143ea"/>
+          <a:blip xmlns:r="http://schemas.openxmlformats.org/officeDocument/2006/relationships" xmlns:a="http://schemas.openxmlformats.org/drawingml/2006/main" r:embed="Rf50b00c1cf6a417c"/>
           <a:stretch xmlns:a="http://schemas.openxmlformats.org/drawingml/2006/main">
             <a:fillRect/>
           </a:stretch>
@@ -1249,7 +1249,7 @@
       </p:pic>
       <p:sp>
         <p:nvSpPr>
-          <p:cNvPr id="10035" name="TextBox 3"/>
+          <p:cNvPr id="100035" name="TextBox 3"/>
           <p:cNvSpPr txBox="1"/>
           <p:nvPr/>
         </p:nvSpPr>
@@ -1275,7 +1275,7 @@
       </p:sp>
       <p:pic>
         <p:nvPicPr>
-          <p:cNvPr id="10036" name="Picture 3" descr="photo.png">
+          <p:cNvPr id="100036" name="Picture 3">
             <a:hlinkClick xmlns:r="http://schemas.openxmlformats.org/officeDocument/2006/relationships" xmlns:a="http://schemas.openxmlformats.org/drawingml/2006/main" r:id="" action="ppaction://hlinkshowjump?jump=nextslide" tooltip="Advance one slide"/>
           </p:cNvPr>
           <p:cNvPicPr>
@@ -1284,7 +1284,7 @@
           <p:nvPr/>
         </p:nvPicPr>
         <p:blipFill>
-          <a:blip xmlns:r="http://schemas.openxmlformats.org/officeDocument/2006/relationships" xmlns:a="http://schemas.openxmlformats.org/drawingml/2006/main" r:embed="R89dca8f65cfe4bb1"/>
+          <a:blip xmlns:r="http://schemas.openxmlformats.org/officeDocument/2006/relationships" xmlns:a="http://schemas.openxmlformats.org/drawingml/2006/main" r:embed="R784797d5d6814bbe"/>
           <a:stretch xmlns:a="http://schemas.openxmlformats.org/drawingml/2006/main">
             <a:fillRect/>
           </a:stretch>
@@ -1301,7 +1301,7 @@
       </p:pic>
       <p:sp>
         <p:nvSpPr>
-          <p:cNvPr id="10037" name="TextBox 4"/>
+          <p:cNvPr id="100037" name="TextBox 4"/>
           <p:cNvSpPr txBox="1"/>
           <p:nvPr/>
         </p:nvSpPr>
@@ -1342,7 +1342,7 @@
       <p:grpSpPr/>
       <p:sp>
         <p:nvSpPr>
-          <p:cNvPr id="10038" name="TextBox 1"/>
+          <p:cNvPr id="100038" name="TextBox 1"/>
           <p:cNvSpPr txBox="1"/>
           <p:nvPr/>
         </p:nvSpPr>
@@ -1368,14 +1368,14 @@
       </p:sp>
       <p:pic>
         <p:nvPicPr>
-          <p:cNvPr id="10039" name="Picture 1" descr="photo.png"/>
-          <p:cNvPicPr>
-            <a:picLocks xmlns:a="http://schemas.openxmlformats.org/drawingml/2006/main" noChangeAspect="1"/>
-          </p:cNvPicPr>
-          <p:nvPr/>
-        </p:nvPicPr>
-        <p:blipFill>
-          <a:blip xmlns:r="http://schemas.openxmlformats.org/officeDocument/2006/relationships" xmlns:a="http://schemas.openxmlformats.org/drawingml/2006/main" r:embed="R8c14afd2dd7a4b04"/>
+          <p:cNvPr id="100039" name="Picture 1"/>
+          <p:cNvPicPr>
+            <a:picLocks xmlns:a="http://schemas.openxmlformats.org/drawingml/2006/main" noChangeAspect="1"/>
+          </p:cNvPicPr>
+          <p:nvPr/>
+        </p:nvPicPr>
+        <p:blipFill>
+          <a:blip xmlns:r="http://schemas.openxmlformats.org/officeDocument/2006/relationships" xmlns:a="http://schemas.openxmlformats.org/drawingml/2006/main" r:embed="R01c2d40a77de494d"/>
           <a:stretch xmlns:a="http://schemas.openxmlformats.org/drawingml/2006/main">
             <a:fillRect/>
           </a:stretch>
@@ -1392,7 +1392,7 @@
       </p:pic>
       <p:sp>
         <p:nvSpPr>
-          <p:cNvPr id="10040" name="TextBox 2"/>
+          <p:cNvPr id="100040" name="TextBox 2"/>
           <p:cNvSpPr txBox="1"/>
           <p:nvPr/>
         </p:nvSpPr>
@@ -1418,14 +1418,14 @@
       </p:sp>
       <p:pic>
         <p:nvPicPr>
-          <p:cNvPr id="10041" name="Picture 2" descr="photo.png"/>
-          <p:cNvPicPr>
-            <a:picLocks xmlns:a="http://schemas.openxmlformats.org/drawingml/2006/main" noChangeAspect="1"/>
-          </p:cNvPicPr>
-          <p:nvPr/>
-        </p:nvPicPr>
-        <p:blipFill>
-          <a:blip xmlns:r="http://schemas.openxmlformats.org/officeDocument/2006/relationships" xmlns:a="http://schemas.openxmlformats.org/drawingml/2006/main" r:embed="Rf9d0986673154a75">
+          <p:cNvPr id="100041" name="Picture 2"/>
+          <p:cNvPicPr>
+            <a:picLocks xmlns:a="http://schemas.openxmlformats.org/drawingml/2006/main" noChangeAspect="1"/>
+          </p:cNvPicPr>
+          <p:nvPr/>
+        </p:nvPicPr>
+        <p:blipFill>
+          <a:blip xmlns:r="http://schemas.openxmlformats.org/officeDocument/2006/relationships" xmlns:a="http://schemas.openxmlformats.org/drawingml/2006/main" r:embed="Rd51d33dfed944361">
             <a:lum bright="40000"/>
           </a:blip>
           <a:stretch xmlns:a="http://schemas.openxmlformats.org/drawingml/2006/main">
@@ -1444,7 +1444,7 @@
       </p:pic>
       <p:sp>
         <p:nvSpPr>
-          <p:cNvPr id="10042" name="TextBox 3"/>
+          <p:cNvPr id="100042" name="TextBox 3"/>
           <p:cNvSpPr txBox="1"/>
           <p:nvPr/>
         </p:nvSpPr>
@@ -1470,14 +1470,14 @@
       </p:sp>
       <p:pic>
         <p:nvPicPr>
-          <p:cNvPr id="10043" name="Picture 3" descr="photo.png"/>
-          <p:cNvPicPr>
-            <a:picLocks xmlns:a="http://schemas.openxmlformats.org/drawingml/2006/main" noChangeAspect="1"/>
-          </p:cNvPicPr>
-          <p:nvPr/>
-        </p:nvPicPr>
-        <p:blipFill>
-          <a:blip xmlns:r="http://schemas.openxmlformats.org/officeDocument/2006/relationships" xmlns:a="http://schemas.openxmlformats.org/drawingml/2006/main" r:embed="R5cb1f77702c448fc">
+          <p:cNvPr id="100043" name="Picture 3"/>
+          <p:cNvPicPr>
+            <a:picLocks xmlns:a="http://schemas.openxmlformats.org/drawingml/2006/main" noChangeAspect="1"/>
+          </p:cNvPicPr>
+          <p:nvPr/>
+        </p:nvPicPr>
+        <p:blipFill>
+          <a:blip xmlns:r="http://schemas.openxmlformats.org/officeDocument/2006/relationships" xmlns:a="http://schemas.openxmlformats.org/drawingml/2006/main" r:embed="Rd6d5d6511d6a4d05">
             <a:lum contrast="-30000"/>
           </a:blip>
           <a:stretch xmlns:a="http://schemas.openxmlformats.org/drawingml/2006/main">
@@ -1496,7 +1496,7 @@
       </p:pic>
       <p:sp>
         <p:nvSpPr>
-          <p:cNvPr id="10044" name="TextBox 4"/>
+          <p:cNvPr id="100044" name="TextBox 4"/>
           <p:cNvSpPr txBox="1"/>
           <p:nvPr/>
         </p:nvSpPr>
@@ -1522,14 +1522,14 @@
       </p:sp>
       <p:pic>
         <p:nvPicPr>
-          <p:cNvPr id="10045" name="Picture 4" descr="photo.png"/>
-          <p:cNvPicPr>
-            <a:picLocks xmlns:a="http://schemas.openxmlformats.org/drawingml/2006/main" noChangeAspect="1"/>
-          </p:cNvPicPr>
-          <p:nvPr/>
-        </p:nvPicPr>
-        <p:blipFill>
-          <a:blip xmlns:r="http://schemas.openxmlformats.org/officeDocument/2006/relationships" xmlns:a="http://schemas.openxmlformats.org/drawingml/2006/main" r:embed="R893b0646a50b4400">
+          <p:cNvPr id="100045" name="Picture 4"/>
+          <p:cNvPicPr>
+            <a:picLocks xmlns:a="http://schemas.openxmlformats.org/drawingml/2006/main" noChangeAspect="1"/>
+          </p:cNvPicPr>
+          <p:nvPr/>
+        </p:nvPicPr>
+        <p:blipFill>
+          <a:blip xmlns:r="http://schemas.openxmlformats.org/officeDocument/2006/relationships" xmlns:a="http://schemas.openxmlformats.org/drawingml/2006/main" r:embed="Rd7d72a476f9a4323">
             <a:lum bright="-20000" contrast="40000"/>
           </a:blip>
           <a:stretch xmlns:a="http://schemas.openxmlformats.org/drawingml/2006/main">
@@ -1548,7 +1548,7 @@
       </p:pic>
       <p:sp>
         <p:nvSpPr>
-          <p:cNvPr id="10046" name="TextBox 5"/>
+          <p:cNvPr id="100046" name="TextBox 5"/>
           <p:cNvSpPr txBox="1"/>
           <p:nvPr/>
         </p:nvSpPr>
@@ -1574,14 +1574,14 @@
       </p:sp>
       <p:pic>
         <p:nvPicPr>
-          <p:cNvPr id="10047" name="Picture 5" descr="photo.png"/>
-          <p:cNvPicPr>
-            <a:picLocks xmlns:a="http://schemas.openxmlformats.org/drawingml/2006/main" noChangeAspect="1"/>
-          </p:cNvPicPr>
-          <p:nvPr/>
-        </p:nvPicPr>
-        <p:blipFill>
-          <a:blip xmlns:r="http://schemas.openxmlformats.org/officeDocument/2006/relationships" xmlns:a="http://schemas.openxmlformats.org/drawingml/2006/main" r:embed="R14cc4386a1954ae6"/>
+          <p:cNvPr id="100047" name="Picture 5"/>
+          <p:cNvPicPr>
+            <a:picLocks xmlns:a="http://schemas.openxmlformats.org/drawingml/2006/main" noChangeAspect="1"/>
+          </p:cNvPicPr>
+          <p:nvPr/>
+        </p:nvPicPr>
+        <p:blipFill>
+          <a:blip xmlns:r="http://schemas.openxmlformats.org/officeDocument/2006/relationships" xmlns:a="http://schemas.openxmlformats.org/drawingml/2006/main" r:embed="Rd5035db721214237"/>
           <a:stretch xmlns:a="http://schemas.openxmlformats.org/drawingml/2006/main">
             <a:fillRect/>
           </a:stretch>
@@ -1605,7 +1605,7 @@
       </p:pic>
       <p:sp>
         <p:nvSpPr>
-          <p:cNvPr id="10048" name="TextBox 6"/>
+          <p:cNvPr id="100048" name="TextBox 6"/>
           <p:cNvSpPr txBox="1"/>
           <p:nvPr/>
         </p:nvSpPr>
@@ -1631,14 +1631,14 @@
       </p:sp>
       <p:pic>
         <p:nvPicPr>
-          <p:cNvPr id="10049" name="Picture 6" descr="photo.png"/>
-          <p:cNvPicPr>
-            <a:picLocks xmlns:a="http://schemas.openxmlformats.org/drawingml/2006/main" noChangeAspect="1"/>
-          </p:cNvPicPr>
-          <p:nvPr/>
-        </p:nvPicPr>
-        <p:blipFill>
-          <a:blip xmlns:r="http://schemas.openxmlformats.org/officeDocument/2006/relationships" xmlns:a="http://schemas.openxmlformats.org/drawingml/2006/main" r:embed="Rc8f7516cced54f83"/>
+          <p:cNvPr id="100049" name="Picture 6"/>
+          <p:cNvPicPr>
+            <a:picLocks xmlns:a="http://schemas.openxmlformats.org/drawingml/2006/main" noChangeAspect="1"/>
+          </p:cNvPicPr>
+          <p:nvPr/>
+        </p:nvPicPr>
+        <p:blipFill>
+          <a:blip xmlns:r="http://schemas.openxmlformats.org/officeDocument/2006/relationships" xmlns:a="http://schemas.openxmlformats.org/drawingml/2006/main" r:embed="R14be3aa4bc534a6b"/>
           <a:stretch xmlns:a="http://schemas.openxmlformats.org/drawingml/2006/main">
             <a:fillRect/>
           </a:stretch>
@@ -1662,7 +1662,7 @@
       </p:pic>
       <p:sp>
         <p:nvSpPr>
-          <p:cNvPr id="10050" name="TextBox 7"/>
+          <p:cNvPr id="100050" name="TextBox 7"/>
           <p:cNvSpPr txBox="1"/>
           <p:nvPr/>
         </p:nvSpPr>
@@ -1688,14 +1688,14 @@
       </p:sp>
       <p:pic>
         <p:nvPicPr>
-          <p:cNvPr id="10051" name="Picture 7" descr="photo.png"/>
-          <p:cNvPicPr>
-            <a:picLocks xmlns:a="http://schemas.openxmlformats.org/drawingml/2006/main" noChangeAspect="1"/>
-          </p:cNvPicPr>
-          <p:nvPr/>
-        </p:nvPicPr>
-        <p:blipFill>
-          <a:blip xmlns:r="http://schemas.openxmlformats.org/officeDocument/2006/relationships" xmlns:a="http://schemas.openxmlformats.org/drawingml/2006/main" r:embed="R63351030d4224a66"/>
+          <p:cNvPr id="100051" name="Picture 7"/>
+          <p:cNvPicPr>
+            <a:picLocks xmlns:a="http://schemas.openxmlformats.org/drawingml/2006/main" noChangeAspect="1"/>
+          </p:cNvPicPr>
+          <p:nvPr/>
+        </p:nvPicPr>
+        <p:blipFill>
+          <a:blip xmlns:r="http://schemas.openxmlformats.org/officeDocument/2006/relationships" xmlns:a="http://schemas.openxmlformats.org/drawingml/2006/main" r:embed="R06d29cc1549f44ac"/>
           <a:srcRect xmlns:a="http://schemas.openxmlformats.org/drawingml/2006/main" r="25000" b="15000"/>
           <a:stretch xmlns:a="http://schemas.openxmlformats.org/drawingml/2006/main">
             <a:fillRect/>
@@ -1713,7 +1713,7 @@
       </p:pic>
       <p:sp>
         <p:nvSpPr>
-          <p:cNvPr id="10052" name="TextBox 8"/>
+          <p:cNvPr id="100052" name="TextBox 8"/>
           <p:cNvSpPr txBox="1"/>
           <p:nvPr/>
         </p:nvSpPr>
@@ -1739,14 +1739,14 @@
       </p:sp>
       <p:pic>
         <p:nvPicPr>
-          <p:cNvPr id="10053" name="Picture 8" descr="photo.png"/>
-          <p:cNvPicPr>
-            <a:picLocks xmlns:a="http://schemas.openxmlformats.org/drawingml/2006/main" noChangeAspect="1"/>
-          </p:cNvPicPr>
-          <p:nvPr/>
-        </p:nvPicPr>
-        <p:blipFill>
-          <a:blip xmlns:r="http://schemas.openxmlformats.org/officeDocument/2006/relationships" xmlns:a="http://schemas.openxmlformats.org/drawingml/2006/main" r:embed="R14779046253a40c4">
+          <p:cNvPr id="100053" name="Picture 8"/>
+          <p:cNvPicPr>
+            <a:picLocks xmlns:a="http://schemas.openxmlformats.org/drawingml/2006/main" noChangeAspect="1"/>
+          </p:cNvPicPr>
+          <p:nvPr/>
+        </p:nvPicPr>
+        <p:blipFill>
+          <a:blip xmlns:r="http://schemas.openxmlformats.org/officeDocument/2006/relationships" xmlns:a="http://schemas.openxmlformats.org/drawingml/2006/main" r:embed="R4dd5d15e213b480c">
             <a:lum bright="15000" contrast="20000"/>
           </a:blip>
           <a:srcRect xmlns:a="http://schemas.openxmlformats.org/drawingml/2006/main" l="10000" t="10000" r="10000" b="10000"/>
@@ -1778,7 +1778,7 @@
       </p:pic>
       <p:sp>
         <p:nvSpPr>
-          <p:cNvPr id="10054" name="TextBox 9"/>
+          <p:cNvPr id="100054" name="TextBox 9"/>
           <p:cNvSpPr txBox="1"/>
           <p:nvPr/>
         </p:nvSpPr>
